--- a/Presentation.pptx
+++ b/Presentation.pptx
@@ -7625,7 +7625,7 @@
         </p:nvSpPr>
         <p:spPr>
           <a:xfrm>
-            <a:off x="4287615" y="1030813"/>
+            <a:off x="4267201" y="1070061"/>
             <a:ext cx="3158065" cy="1094144"/>
           </a:xfrm>
           <a:prstGeom prst="roundRect">
@@ -7676,7 +7676,7 @@
         </p:nvSpPr>
         <p:spPr>
           <a:xfrm>
-            <a:off x="8398065" y="972524"/>
+            <a:off x="8398065" y="1071325"/>
             <a:ext cx="2744063" cy="1187617"/>
           </a:xfrm>
           <a:prstGeom prst="roundRect">
@@ -8310,7 +8310,7 @@
         </p:nvSpPr>
         <p:spPr>
           <a:xfrm>
-            <a:off x="4707467" y="453935"/>
+            <a:off x="4699618" y="477545"/>
             <a:ext cx="2167467" cy="493187"/>
           </a:xfrm>
           <a:prstGeom prst="roundRect">
@@ -8367,7 +8367,7 @@
         </p:nvSpPr>
         <p:spPr>
           <a:xfrm>
-            <a:off x="8178799" y="448161"/>
+            <a:off x="8178799" y="472501"/>
             <a:ext cx="3031066" cy="493187"/>
           </a:xfrm>
           <a:prstGeom prst="roundRect">
@@ -8476,7 +8476,7 @@
         </p:nvCxnSpPr>
         <p:spPr>
           <a:xfrm>
-            <a:off x="6867085" y="694754"/>
+            <a:off x="6867085" y="719094"/>
             <a:ext cx="1311714" cy="1"/>
           </a:xfrm>
           <a:prstGeom prst="straightConnector1">
@@ -8658,6 +8658,7 @@
       <p:sp>
         <p:nvSpPr>
           <p:cNvPr id="54" name="Rectangle: Rounded Corners 53">
+            <a:hlinkClick r:id="rId3" action="ppaction://hlinkfile"/>
             <a:extLst>
               <a:ext uri="{FF2B5EF4-FFF2-40B4-BE49-F238E27FC236}">
                 <a16:creationId xmlns:a16="http://schemas.microsoft.com/office/drawing/2014/main" id="{F403B905-DE75-5487-3E76-3E19EB62F4D0}"/>
@@ -8701,7 +8702,7 @@
           <a:p>
             <a:r>
               <a:rPr lang="en-US" dirty="0"/>
-              <a:t>PDF upload → </a:t>
+              <a:t>PDF upload →</a:t>
             </a:r>
           </a:p>
           <a:p>
@@ -8966,6 +8967,420 @@
           </a:prstGeom>
         </p:spPr>
       </p:pic>
+      <p:sp>
+        <p:nvSpPr>
+          <p:cNvPr id="2" name="Rectangle: Rounded Corners 1">
+            <a:extLst>
+              <a:ext uri="{FF2B5EF4-FFF2-40B4-BE49-F238E27FC236}">
+                <a16:creationId xmlns:a16="http://schemas.microsoft.com/office/drawing/2014/main" id="{380FAF4F-D3EB-9742-0F8C-4C5D31590756}"/>
+              </a:ext>
+            </a:extLst>
+          </p:cNvPr>
+          <p:cNvSpPr/>
+          <p:nvPr/>
+        </p:nvSpPr>
+        <p:spPr>
+          <a:xfrm>
+            <a:off x="3682998" y="533376"/>
+            <a:ext cx="4131734" cy="574328"/>
+          </a:xfrm>
+          <a:prstGeom prst="roundRect">
+            <a:avLst/>
+          </a:prstGeom>
+          <a:noFill/>
+          <a:ln>
+            <a:noFill/>
+          </a:ln>
+        </p:spPr>
+        <p:style>
+          <a:lnRef idx="2">
+            <a:schemeClr val="accent1">
+              <a:shade val="15000"/>
+            </a:schemeClr>
+          </a:lnRef>
+          <a:fillRef idx="1">
+            <a:schemeClr val="accent1"/>
+          </a:fillRef>
+          <a:effectRef idx="0">
+            <a:schemeClr val="accent1"/>
+          </a:effectRef>
+          <a:fontRef idx="minor">
+            <a:schemeClr val="lt1"/>
+          </a:fontRef>
+        </p:style>
+        <p:txBody>
+          <a:bodyPr rtlCol="0" anchor="ctr"/>
+          <a:lstStyle/>
+          <a:p>
+            <a:pPr algn="ctr">
+              <a:lnSpc>
+                <a:spcPts val="4000"/>
+              </a:lnSpc>
+            </a:pPr>
+            <a:r>
+              <a:rPr lang="en-US" sz="4400" b="1" dirty="0">
+                <a:solidFill>
+                  <a:srgbClr val="055E55"/>
+                </a:solidFill>
+                <a:effectLst>
+                  <a:outerShdw blurRad="50800" dist="38100" dir="5400000" algn="t" rotWithShape="0">
+                    <a:prstClr val="black">
+                      <a:alpha val="40000"/>
+                    </a:prstClr>
+                  </a:outerShdw>
+                </a:effectLst>
+              </a:rPr>
+              <a:t>Evals</a:t>
+            </a:r>
+          </a:p>
+        </p:txBody>
+      </p:sp>
+      <p:sp>
+        <p:nvSpPr>
+          <p:cNvPr id="3" name="Rectangle: Rounded Corners 2">
+            <a:extLst>
+              <a:ext uri="{FF2B5EF4-FFF2-40B4-BE49-F238E27FC236}">
+                <a16:creationId xmlns:a16="http://schemas.microsoft.com/office/drawing/2014/main" id="{8E16D804-1AA0-0D51-133E-66E3F8598E9C}"/>
+              </a:ext>
+            </a:extLst>
+          </p:cNvPr>
+          <p:cNvSpPr/>
+          <p:nvPr/>
+        </p:nvSpPr>
+        <p:spPr>
+          <a:xfrm>
+            <a:off x="508001" y="2015067"/>
+            <a:ext cx="3431707" cy="3928534"/>
+          </a:xfrm>
+          <a:prstGeom prst="roundRect">
+            <a:avLst/>
+          </a:prstGeom>
+          <a:solidFill>
+            <a:srgbClr val="0B9486"/>
+          </a:solidFill>
+        </p:spPr>
+        <p:style>
+          <a:lnRef idx="2">
+            <a:schemeClr val="accent1">
+              <a:shade val="15000"/>
+            </a:schemeClr>
+          </a:lnRef>
+          <a:fillRef idx="1">
+            <a:schemeClr val="accent1"/>
+          </a:fillRef>
+          <a:effectRef idx="0">
+            <a:schemeClr val="accent1"/>
+          </a:effectRef>
+          <a:fontRef idx="minor">
+            <a:schemeClr val="lt1"/>
+          </a:fontRef>
+        </p:style>
+        <p:txBody>
+          <a:bodyPr rtlCol="0" anchor="ctr"/>
+          <a:lstStyle/>
+          <a:p>
+            <a:pPr algn="ctr"/>
+            <a:endParaRPr lang="en-US"/>
+          </a:p>
+        </p:txBody>
+      </p:sp>
+      <p:grpSp>
+        <p:nvGrpSpPr>
+          <p:cNvPr id="4" name="Group 3">
+            <a:extLst>
+              <a:ext uri="{FF2B5EF4-FFF2-40B4-BE49-F238E27FC236}">
+                <a16:creationId xmlns:a16="http://schemas.microsoft.com/office/drawing/2014/main" id="{F9E75C07-B982-526A-ED50-88F1980AF2F3}"/>
+              </a:ext>
+            </a:extLst>
+          </p:cNvPr>
+          <p:cNvGrpSpPr/>
+          <p:nvPr/>
+        </p:nvGrpSpPr>
+        <p:grpSpPr>
+          <a:xfrm>
+            <a:off x="711202" y="2192866"/>
+            <a:ext cx="3234266" cy="2940519"/>
+            <a:chOff x="7315200" y="1075267"/>
+            <a:chExt cx="3429000" cy="838200"/>
+          </a:xfrm>
+        </p:grpSpPr>
+        <p:cxnSp>
+          <p:nvCxnSpPr>
+            <p:cNvPr id="6" name="Straight Connector 5">
+              <a:extLst>
+                <a:ext uri="{FF2B5EF4-FFF2-40B4-BE49-F238E27FC236}">
+                  <a16:creationId xmlns:a16="http://schemas.microsoft.com/office/drawing/2014/main" id="{7E6D579D-4B44-D9A0-ED69-D322990773A3}"/>
+                </a:ext>
+              </a:extLst>
+            </p:cNvPr>
+            <p:cNvCxnSpPr>
+              <a:cxnSpLocks/>
+            </p:cNvCxnSpPr>
+            <p:nvPr/>
+          </p:nvCxnSpPr>
+          <p:spPr>
+            <a:xfrm>
+              <a:off x="7315200" y="1913467"/>
+              <a:ext cx="3412067" cy="0"/>
+            </a:xfrm>
+            <a:prstGeom prst="line">
+              <a:avLst/>
+            </a:prstGeom>
+            <a:ln w="19050" cap="flat" cmpd="sng" algn="ctr">
+              <a:solidFill>
+                <a:schemeClr val="bg1"/>
+              </a:solidFill>
+              <a:prstDash val="dash"/>
+              <a:round/>
+              <a:headEnd type="none" w="med" len="med"/>
+              <a:tailEnd type="none" w="med" len="med"/>
+            </a:ln>
+          </p:spPr>
+          <p:style>
+            <a:lnRef idx="0">
+              <a:scrgbClr r="0" g="0" b="0"/>
+            </a:lnRef>
+            <a:fillRef idx="0">
+              <a:scrgbClr r="0" g="0" b="0"/>
+            </a:fillRef>
+            <a:effectRef idx="0">
+              <a:scrgbClr r="0" g="0" b="0"/>
+            </a:effectRef>
+            <a:fontRef idx="minor">
+              <a:schemeClr val="tx1"/>
+            </a:fontRef>
+          </p:style>
+        </p:cxnSp>
+        <p:grpSp>
+          <p:nvGrpSpPr>
+            <p:cNvPr id="7" name="Group 6">
+              <a:extLst>
+                <a:ext uri="{FF2B5EF4-FFF2-40B4-BE49-F238E27FC236}">
+                  <a16:creationId xmlns:a16="http://schemas.microsoft.com/office/drawing/2014/main" id="{F049ADD3-6CEF-1195-598F-F707932D61B8}"/>
+                </a:ext>
+              </a:extLst>
+            </p:cNvPr>
+            <p:cNvGrpSpPr/>
+            <p:nvPr/>
+          </p:nvGrpSpPr>
+          <p:grpSpPr>
+            <a:xfrm>
+              <a:off x="7315200" y="1075267"/>
+              <a:ext cx="3429000" cy="838200"/>
+              <a:chOff x="7315200" y="1075267"/>
+              <a:chExt cx="3429000" cy="838200"/>
+            </a:xfrm>
+          </p:grpSpPr>
+          <p:cxnSp>
+            <p:nvCxnSpPr>
+              <p:cNvPr id="8" name="Straight Connector 7">
+                <a:extLst>
+                  <a:ext uri="{FF2B5EF4-FFF2-40B4-BE49-F238E27FC236}">
+                    <a16:creationId xmlns:a16="http://schemas.microsoft.com/office/drawing/2014/main" id="{671E5D02-79F0-CFBE-1424-632FAAF4A0DF}"/>
+                  </a:ext>
+                </a:extLst>
+              </p:cNvPr>
+              <p:cNvCxnSpPr>
+                <a:cxnSpLocks/>
+              </p:cNvCxnSpPr>
+              <p:nvPr/>
+            </p:nvCxnSpPr>
+            <p:spPr>
+              <a:xfrm>
+                <a:off x="7315200" y="1075267"/>
+                <a:ext cx="3412067" cy="0"/>
+              </a:xfrm>
+              <a:prstGeom prst="line">
+                <a:avLst/>
+              </a:prstGeom>
+              <a:ln w="19050" cap="flat" cmpd="sng" algn="ctr">
+                <a:solidFill>
+                  <a:schemeClr val="bg1"/>
+                </a:solidFill>
+                <a:prstDash val="dash"/>
+                <a:round/>
+                <a:headEnd type="none" w="med" len="med"/>
+                <a:tailEnd type="none" w="med" len="med"/>
+              </a:ln>
+            </p:spPr>
+            <p:style>
+              <a:lnRef idx="0">
+                <a:scrgbClr r="0" g="0" b="0"/>
+              </a:lnRef>
+              <a:fillRef idx="0">
+                <a:scrgbClr r="0" g="0" b="0"/>
+              </a:fillRef>
+              <a:effectRef idx="0">
+                <a:scrgbClr r="0" g="0" b="0"/>
+              </a:effectRef>
+              <a:fontRef idx="minor">
+                <a:schemeClr val="tx1"/>
+              </a:fontRef>
+            </p:style>
+          </p:cxnSp>
+          <p:cxnSp>
+            <p:nvCxnSpPr>
+              <p:cNvPr id="9" name="Straight Connector 8">
+                <a:extLst>
+                  <a:ext uri="{FF2B5EF4-FFF2-40B4-BE49-F238E27FC236}">
+                    <a16:creationId xmlns:a16="http://schemas.microsoft.com/office/drawing/2014/main" id="{4399C8A5-4AC8-E3C9-3972-DFF7EB03E799}"/>
+                  </a:ext>
+                </a:extLst>
+              </p:cNvPr>
+              <p:cNvCxnSpPr>
+                <a:cxnSpLocks/>
+              </p:cNvCxnSpPr>
+              <p:nvPr/>
+            </p:nvCxnSpPr>
+            <p:spPr>
+              <a:xfrm>
+                <a:off x="10744200" y="1075267"/>
+                <a:ext cx="0" cy="838200"/>
+              </a:xfrm>
+              <a:prstGeom prst="line">
+                <a:avLst/>
+              </a:prstGeom>
+              <a:ln w="19050" cap="flat" cmpd="sng" algn="ctr">
+                <a:solidFill>
+                  <a:schemeClr val="bg1"/>
+                </a:solidFill>
+                <a:prstDash val="dash"/>
+                <a:round/>
+                <a:headEnd type="none" w="med" len="med"/>
+                <a:tailEnd type="none" w="med" len="med"/>
+              </a:ln>
+            </p:spPr>
+            <p:style>
+              <a:lnRef idx="0">
+                <a:scrgbClr r="0" g="0" b="0"/>
+              </a:lnRef>
+              <a:fillRef idx="0">
+                <a:scrgbClr r="0" g="0" b="0"/>
+              </a:fillRef>
+              <a:effectRef idx="0">
+                <a:scrgbClr r="0" g="0" b="0"/>
+              </a:effectRef>
+              <a:fontRef idx="minor">
+                <a:schemeClr val="tx1"/>
+              </a:fontRef>
+            </p:style>
+          </p:cxnSp>
+          <p:cxnSp>
+            <p:nvCxnSpPr>
+              <p:cNvPr id="10" name="Straight Connector 9">
+                <a:extLst>
+                  <a:ext uri="{FF2B5EF4-FFF2-40B4-BE49-F238E27FC236}">
+                    <a16:creationId xmlns:a16="http://schemas.microsoft.com/office/drawing/2014/main" id="{5F69E112-E8B6-028D-0887-90AACBD0B923}"/>
+                  </a:ext>
+                </a:extLst>
+              </p:cNvPr>
+              <p:cNvCxnSpPr>
+                <a:cxnSpLocks/>
+              </p:cNvCxnSpPr>
+              <p:nvPr/>
+            </p:nvCxnSpPr>
+            <p:spPr>
+              <a:xfrm>
+                <a:off x="7323667" y="1075267"/>
+                <a:ext cx="0" cy="838200"/>
+              </a:xfrm>
+              <a:prstGeom prst="line">
+                <a:avLst/>
+              </a:prstGeom>
+              <a:ln w="19050" cap="flat" cmpd="sng" algn="ctr">
+                <a:solidFill>
+                  <a:schemeClr val="bg1"/>
+                </a:solidFill>
+                <a:prstDash val="dash"/>
+                <a:round/>
+                <a:headEnd type="none" w="med" len="med"/>
+                <a:tailEnd type="none" w="med" len="med"/>
+              </a:ln>
+            </p:spPr>
+            <p:style>
+              <a:lnRef idx="0">
+                <a:scrgbClr r="0" g="0" b="0"/>
+              </a:lnRef>
+              <a:fillRef idx="0">
+                <a:scrgbClr r="0" g="0" b="0"/>
+              </a:fillRef>
+              <a:effectRef idx="0">
+                <a:scrgbClr r="0" g="0" b="0"/>
+              </a:effectRef>
+              <a:fontRef idx="minor">
+                <a:schemeClr val="tx1"/>
+              </a:fontRef>
+            </p:style>
+          </p:cxnSp>
+        </p:grpSp>
+      </p:grpSp>
+      <p:sp>
+        <p:nvSpPr>
+          <p:cNvPr id="11" name="Rectangle 10">
+            <a:extLst>
+              <a:ext uri="{FF2B5EF4-FFF2-40B4-BE49-F238E27FC236}">
+                <a16:creationId xmlns:a16="http://schemas.microsoft.com/office/drawing/2014/main" id="{0FA9301E-6AAE-D640-EF37-23158DEA5D69}"/>
+              </a:ext>
+            </a:extLst>
+          </p:cNvPr>
+          <p:cNvSpPr/>
+          <p:nvPr/>
+        </p:nvSpPr>
+        <p:spPr>
+          <a:xfrm>
+            <a:off x="1515536" y="2281878"/>
+            <a:ext cx="2725146" cy="2557781"/>
+          </a:xfrm>
+          <a:prstGeom prst="rect">
+            <a:avLst/>
+          </a:prstGeom>
+          <a:noFill/>
+          <a:ln>
+            <a:noFill/>
+          </a:ln>
+        </p:spPr>
+        <p:style>
+          <a:lnRef idx="2">
+            <a:schemeClr val="accent1">
+              <a:shade val="15000"/>
+            </a:schemeClr>
+          </a:lnRef>
+          <a:fillRef idx="1">
+            <a:schemeClr val="accent1"/>
+          </a:fillRef>
+          <a:effectRef idx="0">
+            <a:schemeClr val="accent1"/>
+          </a:effectRef>
+          <a:fontRef idx="minor">
+            <a:schemeClr val="lt1"/>
+          </a:fontRef>
+        </p:style>
+        <p:txBody>
+          <a:bodyPr rtlCol="0" anchor="ctr"/>
+          <a:lstStyle/>
+          <a:p>
+            <a:pPr algn="ctr"/>
+            <a:r>
+              <a:rPr lang="en-US" dirty="0"/>
+              <a:t>Our money is everywhere</a:t>
+            </a:r>
+          </a:p>
+          <a:p>
+            <a:r>
+              <a:rPr lang="en-US" sz="1400" dirty="0"/>
+              <a:t>Bills, pay stubs, bank apps, and spreadsheets don’t talk to each other. There is no </a:t>
+            </a:r>
+            <a:r>
+              <a:rPr lang="en-US" sz="1400" b="1" dirty="0"/>
+              <a:t>single place</a:t>
+            </a:r>
+            <a:r>
+              <a:rPr lang="en-US" sz="1400" dirty="0"/>
+              <a:t> to see income, expenses, and obligations</a:t>
+            </a:r>
+          </a:p>
+        </p:txBody>
+      </p:sp>
     </p:spTree>
     <p:extLst>
       <p:ext uri="{BB962C8B-B14F-4D97-AF65-F5344CB8AC3E}">
